--- a/poster/NFT_Copymint_Poster.pptx
+++ b/poster/NFT_Copymint_Poster.pptx
@@ -5268,7 +5268,7 @@
                 </a:solidFill>
                 <a:latin typeface="Arial"/>
               </a:rPr>
-              <a:t>The honest part: what ORB costs</a:t>
+              <a:t>What ORB costs: space and time</a:t>
             </a:r>
           </a:p>
         </p:txBody>
@@ -5326,7 +5326,139 @@
         <p:spPr>
           <a:xfrm>
             <a:off x="720000" y="27575999"/>
-            <a:ext cx="11592000" cy="1440000"/>
+            <a:ext cx="5580000" cy="468000"/>
+          </a:xfrm>
+          <a:prstGeom prst="rect">
+            <a:avLst/>
+          </a:prstGeom>
+          <a:noFill/>
+        </p:spPr>
+        <p:txBody>
+          <a:bodyPr wrap="square" anchor="t" lIns="0" rIns="0" tIns="0" bIns="0">
+            <a:spAutoFit/>
+          </a:bodyPr>
+          <a:lstStyle/>
+          <a:p>
+            <a:pPr algn="l">
+              <a:lnSpc>
+                <a:spcPct val="112000"/>
+              </a:lnSpc>
+              <a:spcAft>
+                <a:spcPts val="0"/>
+              </a:spcAft>
+            </a:pPr>
+            <a:r>
+              <a:rPr sz="2400" b="1" i="0">
+                <a:solidFill>
+                  <a:srgbClr val="2B2B2B"/>
+                </a:solidFill>
+                <a:latin typeface="Arial"/>
+              </a:rPr>
+              <a:t>Space: too big for the transaction</a:t>
+            </a:r>
+          </a:p>
+        </p:txBody>
+      </p:sp>
+      <p:pic>
+        <p:nvPicPr>
+          <p:cNvPr id="49" name="Picture 48" descr="fig_storage.png"/>
+          <p:cNvPicPr>
+            <a:picLocks noChangeAspect="1"/>
+          </p:cNvPicPr>
+          <p:nvPr/>
+        </p:nvPicPr>
+        <p:blipFill>
+          <a:blip r:embed="rId5"/>
+          <a:stretch>
+            <a:fillRect/>
+          </a:stretch>
+        </p:blipFill>
+        <p:spPr>
+          <a:xfrm>
+            <a:off x="720000" y="28151999"/>
+            <a:ext cx="5580000" cy="3450455"/>
+          </a:xfrm>
+          <a:prstGeom prst="rect">
+            <a:avLst/>
+          </a:prstGeom>
+        </p:spPr>
+      </p:pic>
+      <p:sp>
+        <p:nvSpPr>
+          <p:cNvPr id="50" name="TextBox 49"/>
+          <p:cNvSpPr txBox="1"/>
+          <p:nvPr/>
+        </p:nvSpPr>
+        <p:spPr>
+          <a:xfrm>
+            <a:off x="6732000" y="27575999"/>
+            <a:ext cx="5580000" cy="468000"/>
+          </a:xfrm>
+          <a:prstGeom prst="rect">
+            <a:avLst/>
+          </a:prstGeom>
+          <a:noFill/>
+        </p:spPr>
+        <p:txBody>
+          <a:bodyPr wrap="square" anchor="t" lIns="0" rIns="0" tIns="0" bIns="0">
+            <a:spAutoFit/>
+          </a:bodyPr>
+          <a:lstStyle/>
+          <a:p>
+            <a:pPr algn="l">
+              <a:lnSpc>
+                <a:spcPct val="112000"/>
+              </a:lnSpc>
+              <a:spcAft>
+                <a:spcPts val="0"/>
+              </a:spcAft>
+            </a:pPr>
+            <a:r>
+              <a:rPr sz="2400" b="1" i="0">
+                <a:solidFill>
+                  <a:srgbClr val="2B2B2B"/>
+                </a:solidFill>
+                <a:latin typeface="Arial"/>
+              </a:rPr>
+              <a:t>Time: comparing is what's slow</a:t>
+            </a:r>
+          </a:p>
+        </p:txBody>
+      </p:sp>
+      <p:pic>
+        <p:nvPicPr>
+          <p:cNvPr id="51" name="Picture 50" descr="fig_time_bars.png"/>
+          <p:cNvPicPr>
+            <a:picLocks noChangeAspect="1"/>
+          </p:cNvPicPr>
+          <p:nvPr/>
+        </p:nvPicPr>
+        <p:blipFill>
+          <a:blip r:embed="rId6"/>
+          <a:stretch>
+            <a:fillRect/>
+          </a:stretch>
+        </p:blipFill>
+        <p:spPr>
+          <a:xfrm>
+            <a:off x="6732000" y="28151999"/>
+            <a:ext cx="5580000" cy="3847882"/>
+          </a:xfrm>
+          <a:prstGeom prst="rect">
+            <a:avLst/>
+          </a:prstGeom>
+        </p:spPr>
+      </p:pic>
+      <p:sp>
+        <p:nvSpPr>
+          <p:cNvPr id="52" name="TextBox 51"/>
+          <p:cNvSpPr txBox="1"/>
+          <p:nvPr/>
+        </p:nvSpPr>
+        <p:spPr>
+          <a:xfrm>
+            <a:off x="720000" y="32179882"/>
+            <a:ext cx="5580000" cy="2015999"/>
           </a:xfrm>
           <a:prstGeom prst="rect">
             <a:avLst/>
@@ -5348,87 +5480,72 @@
               </a:spcAft>
             </a:pPr>
             <a:r>
-              <a:rPr sz="2600" b="0" i="0">
+              <a:rPr sz="2200" b="0" i="0">
                 <a:solidFill>
                   <a:srgbClr val="2B2B2B"/>
                 </a:solidFill>
                 <a:latin typeface="Arial"/>
               </a:rPr>
-              <a:t>The paper stores its four hashes, </a:t>
-            </a:r>
-            <a:r>
-              <a:rPr sz="2600" b="1" i="0">
+              <a:t>The paper stores its four hashes (</a:t>
+            </a:r>
+            <a:r>
+              <a:rPr sz="2200" b="1" i="0">
                 <a:solidFill>
                   <a:srgbClr val="2B2B2B"/>
                 </a:solidFill>
                 <a:latin typeface="Arial"/>
               </a:rPr>
-              <a:t>≈56 bytes</a:t>
-            </a:r>
-            <a:r>
-              <a:rPr sz="2600" b="0" i="0">
+              <a:t>≈56 B</a:t>
+            </a:r>
+            <a:r>
+              <a:rPr sz="2200" b="0" i="0">
                 <a:solidFill>
                   <a:srgbClr val="2B2B2B"/>
                 </a:solidFill>
                 <a:latin typeface="Arial"/>
               </a:rPr>
-              <a:t>, inside each mint transaction (300–500 bytes). ORB stores </a:t>
-            </a:r>
-            <a:r>
-              <a:rPr sz="2600" b="1" i="0">
+              <a:t>) in each mint transaction (300–500 B). ORB needs </a:t>
+            </a:r>
+            <a:r>
+              <a:rPr sz="2200" b="1" i="0">
                 <a:solidFill>
                   <a:srgbClr val="2B2B2B"/>
                 </a:solidFill>
                 <a:latin typeface="Arial"/>
               </a:rPr>
-              <a:t>14,560 bytes</a:t>
-            </a:r>
-            <a:r>
-              <a:rPr sz="2600" b="0" i="0">
+              <a:t>14,560 B</a:t>
+            </a:r>
+            <a:r>
+              <a:rPr sz="2200" b="0" i="0">
                 <a:solidFill>
                   <a:srgbClr val="2B2B2B"/>
                 </a:solidFill>
                 <a:latin typeface="Arial"/>
               </a:rPr>
-              <a:t> per image: about 36 transactions.</a:t>
-            </a:r>
-          </a:p>
-        </p:txBody>
-      </p:sp>
-      <p:pic>
-        <p:nvPicPr>
-          <p:cNvPr id="49" name="Picture 48" descr="fig_storage.png"/>
-          <p:cNvPicPr>
-            <a:picLocks noChangeAspect="1"/>
-          </p:cNvPicPr>
-          <p:nvPr/>
-        </p:nvPicPr>
-        <p:blipFill>
-          <a:blip r:embed="rId5"/>
-          <a:stretch>
-            <a:fillRect/>
-          </a:stretch>
-        </p:blipFill>
-        <p:spPr>
-          <a:xfrm>
-            <a:off x="3060000" y="29087999"/>
-            <a:ext cx="6912000" cy="4274112"/>
-          </a:xfrm>
-          <a:prstGeom prst="rect">
-            <a:avLst/>
-          </a:prstGeom>
-        </p:spPr>
-      </p:pic>
-      <p:sp>
-        <p:nvSpPr>
-          <p:cNvPr id="50" name="TextBox 49"/>
+              <a:t>, about 36 transactions; at 32 landmarks it only ties sHash. </a:t>
+            </a:r>
+            <a:r>
+              <a:rPr sz="2200" b="1" i="0">
+                <a:solidFill>
+                  <a:srgbClr val="2B2B2B"/>
+                </a:solidFill>
+                <a:latin typeface="Arial"/>
+              </a:rPr>
+              <a:t>No size both fits and wins.</a:t>
+            </a:r>
+          </a:p>
+        </p:txBody>
+      </p:sp>
+      <p:sp>
+        <p:nvSpPr>
+          <p:cNvPr id="53" name="TextBox 52"/>
           <p:cNvSpPr txBox="1"/>
           <p:nvPr/>
         </p:nvSpPr>
         <p:spPr>
           <a:xfrm>
-            <a:off x="720000" y="33506112"/>
-            <a:ext cx="11592000" cy="936000"/>
+            <a:off x="6732000" y="32179882"/>
+            <a:ext cx="5580000" cy="2015999"/>
           </a:xfrm>
           <a:prstGeom prst="rect">
             <a:avLst/>
@@ -5450,168 +5567,33 @@
               </a:spcAft>
             </a:pPr>
             <a:r>
-              <a:rPr sz="2600" b="0" i="0">
+              <a:rPr sz="2200" b="0" i="0">
                 <a:solidFill>
                   <a:srgbClr val="2B2B2B"/>
                 </a:solidFill>
                 <a:latin typeface="Arial"/>
               </a:rPr>
-              <a:t>Shrink it and the advantage goes first: at 32 landmarks (1 KB, still 2.6 transactions) ORB only ties sHash. </a:t>
-            </a:r>
-            <a:r>
-              <a:rPr sz="2600" b="1" i="0">
+              <a:t>Making a fingerprint costs about the same. </a:t>
+            </a:r>
+            <a:r>
+              <a:rPr sz="2200" b="1" i="0">
                 <a:solidFill>
                   <a:srgbClr val="2B2B2B"/>
                 </a:solidFill>
                 <a:latin typeface="Arial"/>
               </a:rPr>
-              <a:t>No size both fits and wins.</a:t>
-            </a:r>
-          </a:p>
-        </p:txBody>
-      </p:sp>
-      <p:sp>
-        <p:nvSpPr>
-          <p:cNvPr id="51" name="Rectangle 50"/>
-          <p:cNvSpPr/>
-          <p:nvPr/>
-        </p:nvSpPr>
-        <p:spPr>
-          <a:xfrm>
-            <a:off x="12888000" y="5400000"/>
-            <a:ext cx="11592000" cy="827999"/>
-          </a:xfrm>
-          <a:prstGeom prst="rect">
-            <a:avLst/>
-          </a:prstGeom>
-          <a:solidFill>
-            <a:srgbClr val="E3EAF5"/>
-          </a:solidFill>
-          <a:ln>
-            <a:noFill/>
-          </a:ln>
-          <a:effectLst/>
-        </p:spPr>
-        <p:style>
-          <a:lnRef idx="1">
-            <a:schemeClr val="accent1"/>
-          </a:lnRef>
-          <a:fillRef idx="3">
-            <a:schemeClr val="accent1"/>
-          </a:fillRef>
-          <a:effectRef idx="2">
-            <a:schemeClr val="accent1"/>
-          </a:effectRef>
-          <a:fontRef idx="minor">
-            <a:schemeClr val="lt1"/>
-          </a:fontRef>
-        </p:style>
-        <p:txBody>
-          <a:bodyPr rtlCol="0" anchor="ctr" lIns="432000"/>
-          <a:lstStyle/>
-          <a:p>
-            <a:pPr algn="l"/>
-            <a:r>
-              <a:rPr sz="3800" b="1">
-                <a:solidFill>
-                  <a:srgbClr val="1B3A6B"/>
-                </a:solidFill>
-                <a:latin typeface="Arial"/>
-              </a:rPr>
-              <a:t>Our replacement: ORB feature matching</a:t>
-            </a:r>
-          </a:p>
-        </p:txBody>
-      </p:sp>
-      <p:sp>
-        <p:nvSpPr>
-          <p:cNvPr id="52" name="Rectangle 51"/>
-          <p:cNvSpPr/>
-          <p:nvPr/>
-        </p:nvSpPr>
-        <p:spPr>
-          <a:xfrm>
-            <a:off x="12888000" y="5400000"/>
-            <a:ext cx="162000" cy="827999"/>
-          </a:xfrm>
-          <a:prstGeom prst="rect">
-            <a:avLst/>
-          </a:prstGeom>
-          <a:solidFill>
-            <a:srgbClr val="1B3A6B"/>
-          </a:solidFill>
-          <a:ln>
-            <a:noFill/>
-          </a:ln>
-          <a:effectLst/>
-        </p:spPr>
-        <p:style>
-          <a:lnRef idx="1">
-            <a:schemeClr val="accent1"/>
-          </a:lnRef>
-          <a:fillRef idx="3">
-            <a:schemeClr val="accent1"/>
-          </a:fillRef>
-          <a:effectRef idx="2">
-            <a:schemeClr val="accent1"/>
-          </a:effectRef>
-          <a:fontRef idx="minor">
-            <a:schemeClr val="lt1"/>
-          </a:fontRef>
-        </p:style>
-        <p:txBody>
-          <a:bodyPr rtlCol="0" anchor="ctr"/>
-          <a:lstStyle/>
-          <a:p>
-            <a:pPr algn="ctr"/>
-          </a:p>
-        </p:txBody>
-      </p:sp>
-      <p:pic>
-        <p:nvPicPr>
-          <p:cNvPr id="53" name="Picture 52" descr="orb_match_rotate.png"/>
-          <p:cNvPicPr>
-            <a:picLocks noChangeAspect="1"/>
-          </p:cNvPicPr>
-          <p:nvPr/>
-        </p:nvPicPr>
-        <p:blipFill>
-          <a:blip r:embed="rId6"/>
-          <a:stretch>
-            <a:fillRect/>
-          </a:stretch>
-        </p:blipFill>
-        <p:spPr>
-          <a:xfrm>
-            <a:off x="12888000" y="6516000"/>
-            <a:ext cx="6300000" cy="4011328"/>
-          </a:xfrm>
-          <a:prstGeom prst="rect">
-            <a:avLst/>
-          </a:prstGeom>
-        </p:spPr>
-      </p:pic>
-      <p:sp>
-        <p:nvSpPr>
-          <p:cNvPr id="54" name="TextBox 53"/>
-          <p:cNvSpPr txBox="1"/>
-          <p:nvPr/>
-        </p:nvSpPr>
-        <p:spPr>
-          <a:xfrm>
-            <a:off x="19476000" y="6516000"/>
-            <a:ext cx="5004000" cy="4011328"/>
-          </a:xfrm>
-          <a:prstGeom prst="rect">
-            <a:avLst/>
-          </a:prstGeom>
-          <a:noFill/>
-        </p:spPr>
-        <p:txBody>
-          <a:bodyPr wrap="square" anchor="ctr" lIns="0" rIns="0" tIns="0" bIns="0">
-            <a:spAutoFit/>
-          </a:bodyPr>
-          <a:lstStyle/>
+              <a:t>Comparing a pair takes ≈34 ms for ORB, ≈0.1 µs for sHash</a:t>
+            </a:r>
+            <a:r>
+              <a:rPr sz="2200" b="0" i="0">
+                <a:solidFill>
+                  <a:srgbClr val="2B2B2B"/>
+                </a:solidFill>
+                <a:latin typeface="Arial"/>
+              </a:rPr>
+              <a:t>; shrinking ORB to 128 landmarks still leaves 24 ms. ORB needs an index such as LSH.</a:t>
+            </a:r>
+          </a:p>
           <a:p>
             <a:pPr algn="l">
               <a:lnSpc>
@@ -5622,60 +5604,159 @@
               </a:spcAft>
             </a:pPr>
             <a:r>
-              <a:rPr sz="2400" b="1" i="0">
-                <a:solidFill>
-                  <a:srgbClr val="2B2B2B"/>
-                </a:solidFill>
-                <a:latin typeface="Arial"/>
-              </a:rPr>
-              <a:t>Find landmarks</a:t>
-            </a:r>
-            <a:r>
-              <a:rPr sz="2400" b="0" i="0">
-                <a:solidFill>
-                  <a:srgbClr val="2B2B2B"/>
-                </a:solidFill>
-                <a:latin typeface="Arial"/>
-              </a:rPr>
-              <a:t> (corners) in both images, </a:t>
-            </a:r>
-            <a:r>
-              <a:rPr sz="2400" b="1" i="0">
-                <a:solidFill>
-                  <a:srgbClr val="2B2B2B"/>
-                </a:solidFill>
-                <a:latin typeface="Arial"/>
-              </a:rPr>
-              <a:t>match</a:t>
-            </a:r>
-            <a:r>
-              <a:rPr sz="2400" b="0" i="0">
-                <a:solidFill>
-                  <a:srgbClr val="2B2B2B"/>
-                </a:solidFill>
-                <a:latin typeface="Arial"/>
-              </a:rPr>
-              <a:t> them, and let </a:t>
-            </a:r>
-            <a:r>
-              <a:rPr sz="2400" b="1" i="0">
-                <a:solidFill>
-                  <a:srgbClr val="2B2B2B"/>
-                </a:solidFill>
-                <a:latin typeface="Arial"/>
-              </a:rPr>
-              <a:t>RANSAC</a:t>
-            </a:r>
-            <a:r>
-              <a:rPr sz="2400" b="0" i="0">
-                <a:solidFill>
-                  <a:srgbClr val="2B2B2B"/>
-                </a:solidFill>
-                <a:latin typeface="Arial"/>
-              </a:rPr>
-              <a:t> keep only the matches that agree on one transformation.</a:t>
-            </a:r>
-          </a:p>
+              <a:rPr sz="1900" b="0" i="0">
+                <a:solidFill>
+                  <a:srgbClr val="5F6368"/>
+                </a:solidFill>
+                <a:latin typeface="Arial"/>
+              </a:rPr>
+              <a:t>455 / 128: landmarks kept. Python library, as used: 68 ms, 11 µs.</a:t>
+            </a:r>
+          </a:p>
+        </p:txBody>
+      </p:sp>
+      <p:sp>
+        <p:nvSpPr>
+          <p:cNvPr id="54" name="Rectangle 53"/>
+          <p:cNvSpPr/>
+          <p:nvPr/>
+        </p:nvSpPr>
+        <p:spPr>
+          <a:xfrm>
+            <a:off x="12888000" y="5400000"/>
+            <a:ext cx="11592000" cy="827999"/>
+          </a:xfrm>
+          <a:prstGeom prst="rect">
+            <a:avLst/>
+          </a:prstGeom>
+          <a:solidFill>
+            <a:srgbClr val="E3EAF5"/>
+          </a:solidFill>
+          <a:ln>
+            <a:noFill/>
+          </a:ln>
+          <a:effectLst/>
+        </p:spPr>
+        <p:style>
+          <a:lnRef idx="1">
+            <a:schemeClr val="accent1"/>
+          </a:lnRef>
+          <a:fillRef idx="3">
+            <a:schemeClr val="accent1"/>
+          </a:fillRef>
+          <a:effectRef idx="2">
+            <a:schemeClr val="accent1"/>
+          </a:effectRef>
+          <a:fontRef idx="minor">
+            <a:schemeClr val="lt1"/>
+          </a:fontRef>
+        </p:style>
+        <p:txBody>
+          <a:bodyPr rtlCol="0" anchor="ctr" lIns="432000"/>
+          <a:lstStyle/>
+          <a:p>
+            <a:pPr algn="l"/>
+            <a:r>
+              <a:rPr sz="3800" b="1">
+                <a:solidFill>
+                  <a:srgbClr val="1B3A6B"/>
+                </a:solidFill>
+                <a:latin typeface="Arial"/>
+              </a:rPr>
+              <a:t>Our replacement: ORB feature matching</a:t>
+            </a:r>
+          </a:p>
+        </p:txBody>
+      </p:sp>
+      <p:sp>
+        <p:nvSpPr>
+          <p:cNvPr id="55" name="Rectangle 54"/>
+          <p:cNvSpPr/>
+          <p:nvPr/>
+        </p:nvSpPr>
+        <p:spPr>
+          <a:xfrm>
+            <a:off x="12888000" y="5400000"/>
+            <a:ext cx="162000" cy="827999"/>
+          </a:xfrm>
+          <a:prstGeom prst="rect">
+            <a:avLst/>
+          </a:prstGeom>
+          <a:solidFill>
+            <a:srgbClr val="1B3A6B"/>
+          </a:solidFill>
+          <a:ln>
+            <a:noFill/>
+          </a:ln>
+          <a:effectLst/>
+        </p:spPr>
+        <p:style>
+          <a:lnRef idx="1">
+            <a:schemeClr val="accent1"/>
+          </a:lnRef>
+          <a:fillRef idx="3">
+            <a:schemeClr val="accent1"/>
+          </a:fillRef>
+          <a:effectRef idx="2">
+            <a:schemeClr val="accent1"/>
+          </a:effectRef>
+          <a:fontRef idx="minor">
+            <a:schemeClr val="lt1"/>
+          </a:fontRef>
+        </p:style>
+        <p:txBody>
+          <a:bodyPr rtlCol="0" anchor="ctr"/>
+          <a:lstStyle/>
+          <a:p>
+            <a:pPr algn="ctr"/>
+          </a:p>
+        </p:txBody>
+      </p:sp>
+      <p:pic>
+        <p:nvPicPr>
+          <p:cNvPr id="56" name="Picture 55" descr="orb_match_rotate.png"/>
+          <p:cNvPicPr>
+            <a:picLocks noChangeAspect="1"/>
+          </p:cNvPicPr>
+          <p:nvPr/>
+        </p:nvPicPr>
+        <p:blipFill>
+          <a:blip r:embed="rId7"/>
+          <a:stretch>
+            <a:fillRect/>
+          </a:stretch>
+        </p:blipFill>
+        <p:spPr>
+          <a:xfrm>
+            <a:off x="12888000" y="6516000"/>
+            <a:ext cx="6300000" cy="4011328"/>
+          </a:xfrm>
+          <a:prstGeom prst="rect">
+            <a:avLst/>
+          </a:prstGeom>
+        </p:spPr>
+      </p:pic>
+      <p:sp>
+        <p:nvSpPr>
+          <p:cNvPr id="57" name="TextBox 56"/>
+          <p:cNvSpPr txBox="1"/>
+          <p:nvPr/>
+        </p:nvSpPr>
+        <p:spPr>
+          <a:xfrm>
+            <a:off x="19476000" y="6516000"/>
+            <a:ext cx="5004000" cy="4011328"/>
+          </a:xfrm>
+          <a:prstGeom prst="rect">
+            <a:avLst/>
+          </a:prstGeom>
+          <a:noFill/>
+        </p:spPr>
+        <p:txBody>
+          <a:bodyPr wrap="square" anchor="ctr" lIns="0" rIns="0" tIns="0" bIns="0">
+            <a:spAutoFit/>
+          </a:bodyPr>
+          <a:lstStyle/>
           <a:p>
             <a:pPr algn="l">
               <a:lnSpc>
@@ -5686,159 +5767,60 @@
               </a:spcAft>
             </a:pPr>
             <a:r>
+              <a:rPr sz="2400" b="1" i="0">
+                <a:solidFill>
+                  <a:srgbClr val="2B2B2B"/>
+                </a:solidFill>
+                <a:latin typeface="Arial"/>
+              </a:rPr>
+              <a:t>Find landmarks</a:t>
+            </a:r>
+            <a:r>
               <a:rPr sz="2400" b="0" i="0">
                 <a:solidFill>
                   <a:srgbClr val="2B2B2B"/>
                 </a:solidFill>
                 <a:latin typeface="Arial"/>
               </a:rPr>
-              <a:t>Here 204 matches agree on one rotation. ORB replaces sHash; the other three hashes and the vote are untouched.</a:t>
-            </a:r>
-          </a:p>
-        </p:txBody>
-      </p:sp>
-      <p:sp>
-        <p:nvSpPr>
-          <p:cNvPr id="55" name="Rectangle 54"/>
-          <p:cNvSpPr/>
-          <p:nvPr/>
-        </p:nvSpPr>
-        <p:spPr>
-          <a:xfrm>
-            <a:off x="12888000" y="10995328"/>
-            <a:ext cx="11592000" cy="827999"/>
-          </a:xfrm>
-          <a:prstGeom prst="rect">
-            <a:avLst/>
-          </a:prstGeom>
-          <a:solidFill>
-            <a:srgbClr val="E3EAF5"/>
-          </a:solidFill>
-          <a:ln>
-            <a:noFill/>
-          </a:ln>
-          <a:effectLst/>
-        </p:spPr>
-        <p:style>
-          <a:lnRef idx="1">
-            <a:schemeClr val="accent1"/>
-          </a:lnRef>
-          <a:fillRef idx="3">
-            <a:schemeClr val="accent1"/>
-          </a:fillRef>
-          <a:effectRef idx="2">
-            <a:schemeClr val="accent1"/>
-          </a:effectRef>
-          <a:fontRef idx="minor">
-            <a:schemeClr val="lt1"/>
-          </a:fontRef>
-        </p:style>
-        <p:txBody>
-          <a:bodyPr rtlCol="0" anchor="ctr" lIns="432000"/>
-          <a:lstStyle/>
-          <a:p>
-            <a:pPr algn="l"/>
-            <a:r>
-              <a:rPr sz="3800" b="1">
-                <a:solidFill>
-                  <a:srgbClr val="1B3A6B"/>
-                </a:solidFill>
-                <a:latin typeface="Arial"/>
-              </a:rPr>
-              <a:t>Result 1: +14.2 F1 on sHash's own job</a:t>
-            </a:r>
-          </a:p>
-        </p:txBody>
-      </p:sp>
-      <p:sp>
-        <p:nvSpPr>
-          <p:cNvPr id="56" name="Rectangle 55"/>
-          <p:cNvSpPr/>
-          <p:nvPr/>
-        </p:nvSpPr>
-        <p:spPr>
-          <a:xfrm>
-            <a:off x="12888000" y="10995328"/>
-            <a:ext cx="162000" cy="827999"/>
-          </a:xfrm>
-          <a:prstGeom prst="rect">
-            <a:avLst/>
-          </a:prstGeom>
-          <a:solidFill>
-            <a:srgbClr val="1B3A6B"/>
-          </a:solidFill>
-          <a:ln>
-            <a:noFill/>
-          </a:ln>
-          <a:effectLst/>
-        </p:spPr>
-        <p:style>
-          <a:lnRef idx="1">
-            <a:schemeClr val="accent1"/>
-          </a:lnRef>
-          <a:fillRef idx="3">
-            <a:schemeClr val="accent1"/>
-          </a:fillRef>
-          <a:effectRef idx="2">
-            <a:schemeClr val="accent1"/>
-          </a:effectRef>
-          <a:fontRef idx="minor">
-            <a:schemeClr val="lt1"/>
-          </a:fontRef>
-        </p:style>
-        <p:txBody>
-          <a:bodyPr rtlCol="0" anchor="ctr"/>
-          <a:lstStyle/>
-          <a:p>
-            <a:pPr algn="ctr"/>
-          </a:p>
-        </p:txBody>
-      </p:sp>
-      <p:pic>
-        <p:nvPicPr>
-          <p:cNvPr id="57" name="Picture 56" descr="fig_head_to_head.png"/>
-          <p:cNvPicPr>
-            <a:picLocks noChangeAspect="1"/>
-          </p:cNvPicPr>
-          <p:nvPr/>
-        </p:nvPicPr>
-        <p:blipFill>
-          <a:blip r:embed="rId7"/>
-          <a:stretch>
-            <a:fillRect/>
-          </a:stretch>
-        </p:blipFill>
-        <p:spPr>
-          <a:xfrm>
-            <a:off x="12888000" y="12111328"/>
-            <a:ext cx="6660000" cy="4393675"/>
-          </a:xfrm>
-          <a:prstGeom prst="rect">
-            <a:avLst/>
-          </a:prstGeom>
-        </p:spPr>
-      </p:pic>
-      <p:sp>
-        <p:nvSpPr>
-          <p:cNvPr id="58" name="TextBox 57"/>
-          <p:cNvSpPr txBox="1"/>
-          <p:nvPr/>
-        </p:nvSpPr>
-        <p:spPr>
-          <a:xfrm>
-            <a:off x="19836000" y="12111328"/>
-            <a:ext cx="4644000" cy="4393675"/>
-          </a:xfrm>
-          <a:prstGeom prst="rect">
-            <a:avLst/>
-          </a:prstGeom>
-          <a:noFill/>
-        </p:spPr>
-        <p:txBody>
-          <a:bodyPr wrap="square" anchor="ctr" lIns="0" rIns="0" tIns="0" bIns="0">
-            <a:spAutoFit/>
-          </a:bodyPr>
-          <a:lstStyle/>
+              <a:t> (corners) in both images, </a:t>
+            </a:r>
+            <a:r>
+              <a:rPr sz="2400" b="1" i="0">
+                <a:solidFill>
+                  <a:srgbClr val="2B2B2B"/>
+                </a:solidFill>
+                <a:latin typeface="Arial"/>
+              </a:rPr>
+              <a:t>match</a:t>
+            </a:r>
+            <a:r>
+              <a:rPr sz="2400" b="0" i="0">
+                <a:solidFill>
+                  <a:srgbClr val="2B2B2B"/>
+                </a:solidFill>
+                <a:latin typeface="Arial"/>
+              </a:rPr>
+              <a:t> them, and let </a:t>
+            </a:r>
+            <a:r>
+              <a:rPr sz="2400" b="1" i="0">
+                <a:solidFill>
+                  <a:srgbClr val="2B2B2B"/>
+                </a:solidFill>
+                <a:latin typeface="Arial"/>
+              </a:rPr>
+              <a:t>RANSAC</a:t>
+            </a:r>
+            <a:r>
+              <a:rPr sz="2400" b="0" i="0">
+                <a:solidFill>
+                  <a:srgbClr val="2B2B2B"/>
+                </a:solidFill>
+                <a:latin typeface="Arial"/>
+              </a:rPr>
+              <a:t> keep only the matches that agree on one transformation.</a:t>
+            </a:r>
+          </a:p>
           <a:p>
             <a:pPr algn="l">
               <a:lnSpc>
@@ -5855,9 +5837,153 @@
                 </a:solidFill>
                 <a:latin typeface="Arial"/>
               </a:rPr>
-              <a:t>On the crop and rotation copies sHash was built for.</a:t>
-            </a:r>
-          </a:p>
+              <a:t>Here 204 matches agree on one rotation. ORB replaces sHash; the other three hashes and the vote are untouched.</a:t>
+            </a:r>
+          </a:p>
+        </p:txBody>
+      </p:sp>
+      <p:sp>
+        <p:nvSpPr>
+          <p:cNvPr id="58" name="Rectangle 57"/>
+          <p:cNvSpPr/>
+          <p:nvPr/>
+        </p:nvSpPr>
+        <p:spPr>
+          <a:xfrm>
+            <a:off x="12888000" y="10995328"/>
+            <a:ext cx="11592000" cy="827999"/>
+          </a:xfrm>
+          <a:prstGeom prst="rect">
+            <a:avLst/>
+          </a:prstGeom>
+          <a:solidFill>
+            <a:srgbClr val="E3EAF5"/>
+          </a:solidFill>
+          <a:ln>
+            <a:noFill/>
+          </a:ln>
+          <a:effectLst/>
+        </p:spPr>
+        <p:style>
+          <a:lnRef idx="1">
+            <a:schemeClr val="accent1"/>
+          </a:lnRef>
+          <a:fillRef idx="3">
+            <a:schemeClr val="accent1"/>
+          </a:fillRef>
+          <a:effectRef idx="2">
+            <a:schemeClr val="accent1"/>
+          </a:effectRef>
+          <a:fontRef idx="minor">
+            <a:schemeClr val="lt1"/>
+          </a:fontRef>
+        </p:style>
+        <p:txBody>
+          <a:bodyPr rtlCol="0" anchor="ctr" lIns="432000"/>
+          <a:lstStyle/>
+          <a:p>
+            <a:pPr algn="l"/>
+            <a:r>
+              <a:rPr sz="3800" b="1">
+                <a:solidFill>
+                  <a:srgbClr val="1B3A6B"/>
+                </a:solidFill>
+                <a:latin typeface="Arial"/>
+              </a:rPr>
+              <a:t>Result 1: +14.2 F1 on sHash's own job</a:t>
+            </a:r>
+          </a:p>
+        </p:txBody>
+      </p:sp>
+      <p:sp>
+        <p:nvSpPr>
+          <p:cNvPr id="59" name="Rectangle 58"/>
+          <p:cNvSpPr/>
+          <p:nvPr/>
+        </p:nvSpPr>
+        <p:spPr>
+          <a:xfrm>
+            <a:off x="12888000" y="10995328"/>
+            <a:ext cx="162000" cy="827999"/>
+          </a:xfrm>
+          <a:prstGeom prst="rect">
+            <a:avLst/>
+          </a:prstGeom>
+          <a:solidFill>
+            <a:srgbClr val="1B3A6B"/>
+          </a:solidFill>
+          <a:ln>
+            <a:noFill/>
+          </a:ln>
+          <a:effectLst/>
+        </p:spPr>
+        <p:style>
+          <a:lnRef idx="1">
+            <a:schemeClr val="accent1"/>
+          </a:lnRef>
+          <a:fillRef idx="3">
+            <a:schemeClr val="accent1"/>
+          </a:fillRef>
+          <a:effectRef idx="2">
+            <a:schemeClr val="accent1"/>
+          </a:effectRef>
+          <a:fontRef idx="minor">
+            <a:schemeClr val="lt1"/>
+          </a:fontRef>
+        </p:style>
+        <p:txBody>
+          <a:bodyPr rtlCol="0" anchor="ctr"/>
+          <a:lstStyle/>
+          <a:p>
+            <a:pPr algn="ctr"/>
+          </a:p>
+        </p:txBody>
+      </p:sp>
+      <p:pic>
+        <p:nvPicPr>
+          <p:cNvPr id="60" name="Picture 59" descr="fig_head_to_head.png"/>
+          <p:cNvPicPr>
+            <a:picLocks noChangeAspect="1"/>
+          </p:cNvPicPr>
+          <p:nvPr/>
+        </p:nvPicPr>
+        <p:blipFill>
+          <a:blip r:embed="rId8"/>
+          <a:stretch>
+            <a:fillRect/>
+          </a:stretch>
+        </p:blipFill>
+        <p:spPr>
+          <a:xfrm>
+            <a:off x="12888000" y="12111328"/>
+            <a:ext cx="7020000" cy="4631171"/>
+          </a:xfrm>
+          <a:prstGeom prst="rect">
+            <a:avLst/>
+          </a:prstGeom>
+        </p:spPr>
+      </p:pic>
+      <p:sp>
+        <p:nvSpPr>
+          <p:cNvPr id="61" name="TextBox 60"/>
+          <p:cNvSpPr txBox="1"/>
+          <p:nvPr/>
+        </p:nvSpPr>
+        <p:spPr>
+          <a:xfrm>
+            <a:off x="20196000" y="12111328"/>
+            <a:ext cx="4284000" cy="4631171"/>
+          </a:xfrm>
+          <a:prstGeom prst="rect">
+            <a:avLst/>
+          </a:prstGeom>
+          <a:noFill/>
+        </p:spPr>
+        <p:txBody>
+          <a:bodyPr wrap="square" anchor="ctr" lIns="0" rIns="0" tIns="0" bIns="0">
+            <a:spAutoFit/>
+          </a:bodyPr>
+          <a:lstStyle/>
           <a:p>
             <a:pPr algn="l">
               <a:lnSpc>
@@ -5874,25 +6000,7 @@
                 </a:solidFill>
                 <a:latin typeface="Arial"/>
               </a:rPr>
-              <a:t>sHash was </a:t>
-            </a:r>
-            <a:r>
-              <a:rPr sz="2400" b="1" i="0">
-                <a:solidFill>
-                  <a:srgbClr val="2B2B2B"/>
-                </a:solidFill>
-                <a:latin typeface="Arial"/>
-              </a:rPr>
-              <a:t>allowed to pick its threshold on the test answers</a:t>
-            </a:r>
-            <a:r>
-              <a:rPr sz="2400" b="0" i="0">
-                <a:solidFill>
-                  <a:srgbClr val="2B2B2B"/>
-                </a:solidFill>
-                <a:latin typeface="Arial"/>
-              </a:rPr>
-              <a:t>; ORB's was set on training data.</a:t>
+              <a:t>On the crop and rotation copies sHash was built for.</a:t>
             </a:r>
           </a:p>
           <a:p>
@@ -5911,7 +6019,7 @@
                 </a:solidFill>
                 <a:latin typeface="Arial"/>
               </a:rPr>
-              <a:t>sHash keeps its recall by flagging </a:t>
+              <a:t>sHash was </a:t>
             </a:r>
             <a:r>
               <a:rPr sz="2400" b="1" i="0">
@@ -5920,7 +6028,7 @@
                 </a:solidFill>
                 <a:latin typeface="Arial"/>
               </a:rPr>
-              <a:t>1,630 of 2,400</a:t>
+              <a:t>allowed to pick its threshold on the test answers</a:t>
             </a:r>
             <a:r>
               <a:rPr sz="2400" b="0" i="0">
@@ -5929,153 +6037,9 @@
                 </a:solidFill>
                 <a:latin typeface="Arial"/>
               </a:rPr>
-              <a:t> innocent images.</a:t>
-            </a:r>
-          </a:p>
-        </p:txBody>
-      </p:sp>
-      <p:sp>
-        <p:nvSpPr>
-          <p:cNvPr id="59" name="Rectangle 58"/>
-          <p:cNvSpPr/>
-          <p:nvPr/>
-        </p:nvSpPr>
-        <p:spPr>
-          <a:xfrm>
-            <a:off x="12888000" y="16973003"/>
-            <a:ext cx="11592000" cy="827999"/>
-          </a:xfrm>
-          <a:prstGeom prst="rect">
-            <a:avLst/>
-          </a:prstGeom>
-          <a:solidFill>
-            <a:srgbClr val="E3EAF5"/>
-          </a:solidFill>
-          <a:ln>
-            <a:noFill/>
-          </a:ln>
-          <a:effectLst/>
-        </p:spPr>
-        <p:style>
-          <a:lnRef idx="1">
-            <a:schemeClr val="accent1"/>
-          </a:lnRef>
-          <a:fillRef idx="3">
-            <a:schemeClr val="accent1"/>
-          </a:fillRef>
-          <a:effectRef idx="2">
-            <a:schemeClr val="accent1"/>
-          </a:effectRef>
-          <a:fontRef idx="minor">
-            <a:schemeClr val="lt1"/>
-          </a:fontRef>
-        </p:style>
-        <p:txBody>
-          <a:bodyPr rtlCol="0" anchor="ctr" lIns="432000"/>
-          <a:lstStyle/>
-          <a:p>
-            <a:pPr algn="l"/>
-            <a:r>
-              <a:rPr sz="3800" b="1">
-                <a:solidFill>
-                  <a:srgbClr val="1B3A6B"/>
-                </a:solidFill>
-                <a:latin typeface="Arial"/>
-              </a:rPr>
-              <a:t>Result 2: it wins almost everywhere</a:t>
-            </a:r>
-          </a:p>
-        </p:txBody>
-      </p:sp>
-      <p:sp>
-        <p:nvSpPr>
-          <p:cNvPr id="60" name="Rectangle 59"/>
-          <p:cNvSpPr/>
-          <p:nvPr/>
-        </p:nvSpPr>
-        <p:spPr>
-          <a:xfrm>
-            <a:off x="12888000" y="16973003"/>
-            <a:ext cx="162000" cy="827999"/>
-          </a:xfrm>
-          <a:prstGeom prst="rect">
-            <a:avLst/>
-          </a:prstGeom>
-          <a:solidFill>
-            <a:srgbClr val="1B3A6B"/>
-          </a:solidFill>
-          <a:ln>
-            <a:noFill/>
-          </a:ln>
-          <a:effectLst/>
-        </p:spPr>
-        <p:style>
-          <a:lnRef idx="1">
-            <a:schemeClr val="accent1"/>
-          </a:lnRef>
-          <a:fillRef idx="3">
-            <a:schemeClr val="accent1"/>
-          </a:fillRef>
-          <a:effectRef idx="2">
-            <a:schemeClr val="accent1"/>
-          </a:effectRef>
-          <a:fontRef idx="minor">
-            <a:schemeClr val="lt1"/>
-          </a:fontRef>
-        </p:style>
-        <p:txBody>
-          <a:bodyPr rtlCol="0" anchor="ctr"/>
-          <a:lstStyle/>
-          <a:p>
-            <a:pPr algn="ctr"/>
-          </a:p>
-        </p:txBody>
-      </p:sp>
-      <p:pic>
-        <p:nvPicPr>
-          <p:cNvPr id="61" name="Picture 60" descr="fig_by_edit_type.png"/>
-          <p:cNvPicPr>
-            <a:picLocks noChangeAspect="1"/>
-          </p:cNvPicPr>
-          <p:nvPr/>
-        </p:nvPicPr>
-        <p:blipFill>
-          <a:blip r:embed="rId8"/>
-          <a:stretch>
-            <a:fillRect/>
-          </a:stretch>
-        </p:blipFill>
-        <p:spPr>
-          <a:xfrm>
-            <a:off x="12888000" y="18089003"/>
-            <a:ext cx="7380000" cy="3463605"/>
-          </a:xfrm>
-          <a:prstGeom prst="rect">
-            <a:avLst/>
-          </a:prstGeom>
-        </p:spPr>
-      </p:pic>
-      <p:sp>
-        <p:nvSpPr>
-          <p:cNvPr id="62" name="TextBox 61"/>
-          <p:cNvSpPr txBox="1"/>
-          <p:nvPr/>
-        </p:nvSpPr>
-        <p:spPr>
-          <a:xfrm>
-            <a:off x="20556000" y="18089003"/>
-            <a:ext cx="3924000" cy="3463605"/>
-          </a:xfrm>
-          <a:prstGeom prst="rect">
-            <a:avLst/>
-          </a:prstGeom>
-          <a:noFill/>
-        </p:spPr>
-        <p:txBody>
-          <a:bodyPr wrap="square" anchor="ctr" lIns="0" rIns="0" tIns="0" bIns="0">
-            <a:spAutoFit/>
-          </a:bodyPr>
-          <a:lstStyle/>
+              <a:t>; ORB's was set on training data.</a:t>
+            </a:r>
+          </a:p>
           <a:p>
             <a:pPr algn="l">
               <a:lnSpc>
@@ -6086,15 +6050,177 @@
               </a:spcAft>
             </a:pPr>
             <a:r>
-              <a:rPr sz="2300" b="0" i="0">
+              <a:rPr sz="2400" b="0" i="0">
                 <a:solidFill>
                   <a:srgbClr val="2B2B2B"/>
                 </a:solidFill>
                 <a:latin typeface="Arial"/>
               </a:rPr>
-              <a:t>Share of each edit's copies ORB catches (precision 91.2%).</a:t>
-            </a:r>
-          </a:p>
+              <a:t>sHash keeps its recall by flagging </a:t>
+            </a:r>
+            <a:r>
+              <a:rPr sz="2400" b="1" i="0">
+                <a:solidFill>
+                  <a:srgbClr val="2B2B2B"/>
+                </a:solidFill>
+                <a:latin typeface="Arial"/>
+              </a:rPr>
+              <a:t>1,630 of 2,400</a:t>
+            </a:r>
+            <a:r>
+              <a:rPr sz="2400" b="0" i="0">
+                <a:solidFill>
+                  <a:srgbClr val="2B2B2B"/>
+                </a:solidFill>
+                <a:latin typeface="Arial"/>
+              </a:rPr>
+              <a:t> innocent images.</a:t>
+            </a:r>
+          </a:p>
+        </p:txBody>
+      </p:sp>
+      <p:sp>
+        <p:nvSpPr>
+          <p:cNvPr id="62" name="Rectangle 61"/>
+          <p:cNvSpPr/>
+          <p:nvPr/>
+        </p:nvSpPr>
+        <p:spPr>
+          <a:xfrm>
+            <a:off x="12888000" y="17210499"/>
+            <a:ext cx="11592000" cy="827999"/>
+          </a:xfrm>
+          <a:prstGeom prst="rect">
+            <a:avLst/>
+          </a:prstGeom>
+          <a:solidFill>
+            <a:srgbClr val="E3EAF5"/>
+          </a:solidFill>
+          <a:ln>
+            <a:noFill/>
+          </a:ln>
+          <a:effectLst/>
+        </p:spPr>
+        <p:style>
+          <a:lnRef idx="1">
+            <a:schemeClr val="accent1"/>
+          </a:lnRef>
+          <a:fillRef idx="3">
+            <a:schemeClr val="accent1"/>
+          </a:fillRef>
+          <a:effectRef idx="2">
+            <a:schemeClr val="accent1"/>
+          </a:effectRef>
+          <a:fontRef idx="minor">
+            <a:schemeClr val="lt1"/>
+          </a:fontRef>
+        </p:style>
+        <p:txBody>
+          <a:bodyPr rtlCol="0" anchor="ctr" lIns="432000"/>
+          <a:lstStyle/>
+          <a:p>
+            <a:pPr algn="l"/>
+            <a:r>
+              <a:rPr sz="3800" b="1">
+                <a:solidFill>
+                  <a:srgbClr val="1B3A6B"/>
+                </a:solidFill>
+                <a:latin typeface="Arial"/>
+              </a:rPr>
+              <a:t>Result 2: it wins almost everywhere</a:t>
+            </a:r>
+          </a:p>
+        </p:txBody>
+      </p:sp>
+      <p:sp>
+        <p:nvSpPr>
+          <p:cNvPr id="63" name="Rectangle 62"/>
+          <p:cNvSpPr/>
+          <p:nvPr/>
+        </p:nvSpPr>
+        <p:spPr>
+          <a:xfrm>
+            <a:off x="12888000" y="17210499"/>
+            <a:ext cx="162000" cy="827999"/>
+          </a:xfrm>
+          <a:prstGeom prst="rect">
+            <a:avLst/>
+          </a:prstGeom>
+          <a:solidFill>
+            <a:srgbClr val="1B3A6B"/>
+          </a:solidFill>
+          <a:ln>
+            <a:noFill/>
+          </a:ln>
+          <a:effectLst/>
+        </p:spPr>
+        <p:style>
+          <a:lnRef idx="1">
+            <a:schemeClr val="accent1"/>
+          </a:lnRef>
+          <a:fillRef idx="3">
+            <a:schemeClr val="accent1"/>
+          </a:fillRef>
+          <a:effectRef idx="2">
+            <a:schemeClr val="accent1"/>
+          </a:effectRef>
+          <a:fontRef idx="minor">
+            <a:schemeClr val="lt1"/>
+          </a:fontRef>
+        </p:style>
+        <p:txBody>
+          <a:bodyPr rtlCol="0" anchor="ctr"/>
+          <a:lstStyle/>
+          <a:p>
+            <a:pPr algn="ctr"/>
+          </a:p>
+        </p:txBody>
+      </p:sp>
+      <p:pic>
+        <p:nvPicPr>
+          <p:cNvPr id="64" name="Picture 63" descr="fig_by_edit_type.png"/>
+          <p:cNvPicPr>
+            <a:picLocks noChangeAspect="1"/>
+          </p:cNvPicPr>
+          <p:nvPr/>
+        </p:nvPicPr>
+        <p:blipFill>
+          <a:blip r:embed="rId9"/>
+          <a:stretch>
+            <a:fillRect/>
+          </a:stretch>
+        </p:blipFill>
+        <p:spPr>
+          <a:xfrm>
+            <a:off x="12888000" y="18326499"/>
+            <a:ext cx="7560000" cy="3548083"/>
+          </a:xfrm>
+          <a:prstGeom prst="rect">
+            <a:avLst/>
+          </a:prstGeom>
+        </p:spPr>
+      </p:pic>
+      <p:sp>
+        <p:nvSpPr>
+          <p:cNvPr id="65" name="TextBox 64"/>
+          <p:cNvSpPr txBox="1"/>
+          <p:nvPr/>
+        </p:nvSpPr>
+        <p:spPr>
+          <a:xfrm>
+            <a:off x="20736000" y="18326499"/>
+            <a:ext cx="3744000" cy="3548083"/>
+          </a:xfrm>
+          <a:prstGeom prst="rect">
+            <a:avLst/>
+          </a:prstGeom>
+          <a:noFill/>
+        </p:spPr>
+        <p:txBody>
+          <a:bodyPr wrap="square" anchor="ctr" lIns="0" rIns="0" tIns="0" bIns="0">
+            <a:spAutoFit/>
+          </a:bodyPr>
+          <a:lstStyle/>
           <a:p>
             <a:pPr algn="l">
               <a:lnSpc>
@@ -6111,25 +6237,7 @@
                 </a:solidFill>
                 <a:latin typeface="Arial"/>
               </a:rPr>
-              <a:t>One clean failure: </a:t>
-            </a:r>
-            <a:r>
-              <a:rPr sz="2300" b="1" i="0">
-                <a:solidFill>
-                  <a:srgbClr val="2B2B2B"/>
-                </a:solidFill>
-                <a:latin typeface="Arial"/>
-              </a:rPr>
-              <a:t>pixelation</a:t>
-            </a:r>
-            <a:r>
-              <a:rPr sz="2300" b="0" i="0">
-                <a:solidFill>
-                  <a:srgbClr val="2B2B2B"/>
-                </a:solidFill>
-                <a:latin typeface="Arial"/>
-              </a:rPr>
-              <a:t> destroys the detail corners are made of.</a:t>
+              <a:t>Share of each edit's copies ORB catches (precision 91.2%).</a:t>
             </a:r>
           </a:p>
           <a:p>
@@ -6142,159 +6250,33 @@
               </a:spcAft>
             </a:pPr>
             <a:r>
-              <a:rPr sz="2000" b="0" i="0">
-                <a:solidFill>
-                  <a:srgbClr val="5F6368"/>
-                </a:solidFill>
-                <a:latin typeface="Arial"/>
-              </a:rPr>
-              <a:t>*Always includes rotation; pure mirrors: 100%.</a:t>
-            </a:r>
-          </a:p>
-        </p:txBody>
-      </p:sp>
-      <p:sp>
-        <p:nvSpPr>
-          <p:cNvPr id="63" name="Rectangle 62"/>
-          <p:cNvSpPr/>
-          <p:nvPr/>
-        </p:nvSpPr>
-        <p:spPr>
-          <a:xfrm>
-            <a:off x="12888000" y="22020609"/>
-            <a:ext cx="11592000" cy="827999"/>
-          </a:xfrm>
-          <a:prstGeom prst="rect">
-            <a:avLst/>
-          </a:prstGeom>
-          <a:solidFill>
-            <a:srgbClr val="E3EAF5"/>
-          </a:solidFill>
-          <a:ln>
-            <a:noFill/>
-          </a:ln>
-          <a:effectLst/>
-        </p:spPr>
-        <p:style>
-          <a:lnRef idx="1">
-            <a:schemeClr val="accent1"/>
-          </a:lnRef>
-          <a:fillRef idx="3">
-            <a:schemeClr val="accent1"/>
-          </a:fillRef>
-          <a:effectRef idx="2">
-            <a:schemeClr val="accent1"/>
-          </a:effectRef>
-          <a:fontRef idx="minor">
-            <a:schemeClr val="lt1"/>
-          </a:fontRef>
-        </p:style>
-        <p:txBody>
-          <a:bodyPr rtlCol="0" anchor="ctr" lIns="432000"/>
-          <a:lstStyle/>
-          <a:p>
-            <a:pPr algn="l"/>
-            <a:r>
-              <a:rPr sz="3800" b="1">
-                <a:solidFill>
-                  <a:srgbClr val="1B3A6B"/>
-                </a:solidFill>
-                <a:latin typeface="Arial"/>
-              </a:rPr>
-              <a:t>Result 3: +8.9 F1 in the whole detector</a:t>
-            </a:r>
-          </a:p>
-        </p:txBody>
-      </p:sp>
-      <p:sp>
-        <p:nvSpPr>
-          <p:cNvPr id="64" name="Rectangle 63"/>
-          <p:cNvSpPr/>
-          <p:nvPr/>
-        </p:nvSpPr>
-        <p:spPr>
-          <a:xfrm>
-            <a:off x="12888000" y="22020609"/>
-            <a:ext cx="162000" cy="827999"/>
-          </a:xfrm>
-          <a:prstGeom prst="rect">
-            <a:avLst/>
-          </a:prstGeom>
-          <a:solidFill>
-            <a:srgbClr val="1B3A6B"/>
-          </a:solidFill>
-          <a:ln>
-            <a:noFill/>
-          </a:ln>
-          <a:effectLst/>
-        </p:spPr>
-        <p:style>
-          <a:lnRef idx="1">
-            <a:schemeClr val="accent1"/>
-          </a:lnRef>
-          <a:fillRef idx="3">
-            <a:schemeClr val="accent1"/>
-          </a:fillRef>
-          <a:effectRef idx="2">
-            <a:schemeClr val="accent1"/>
-          </a:effectRef>
-          <a:fontRef idx="minor">
-            <a:schemeClr val="lt1"/>
-          </a:fontRef>
-        </p:style>
-        <p:txBody>
-          <a:bodyPr rtlCol="0" anchor="ctr"/>
-          <a:lstStyle/>
-          <a:p>
-            <a:pPr algn="ctr"/>
-          </a:p>
-        </p:txBody>
-      </p:sp>
-      <p:pic>
-        <p:nvPicPr>
-          <p:cNvPr id="65" name="Picture 64" descr="fig_whole_detector.png"/>
-          <p:cNvPicPr>
-            <a:picLocks noChangeAspect="1"/>
-          </p:cNvPicPr>
-          <p:nvPr/>
-        </p:nvPicPr>
-        <p:blipFill>
-          <a:blip r:embed="rId9"/>
-          <a:stretch>
-            <a:fillRect/>
-          </a:stretch>
-        </p:blipFill>
-        <p:spPr>
-          <a:xfrm>
-            <a:off x="12888000" y="23136609"/>
-            <a:ext cx="6660000" cy="4074805"/>
-          </a:xfrm>
-          <a:prstGeom prst="rect">
-            <a:avLst/>
-          </a:prstGeom>
-        </p:spPr>
-      </p:pic>
-      <p:sp>
-        <p:nvSpPr>
-          <p:cNvPr id="66" name="TextBox 65"/>
-          <p:cNvSpPr txBox="1"/>
-          <p:nvPr/>
-        </p:nvSpPr>
-        <p:spPr>
-          <a:xfrm>
-            <a:off x="19836000" y="23136609"/>
-            <a:ext cx="4644000" cy="4074805"/>
-          </a:xfrm>
-          <a:prstGeom prst="rect">
-            <a:avLst/>
-          </a:prstGeom>
-          <a:noFill/>
-        </p:spPr>
-        <p:txBody>
-          <a:bodyPr wrap="square" anchor="ctr" lIns="0" rIns="0" tIns="0" bIns="0">
-            <a:spAutoFit/>
-          </a:bodyPr>
-          <a:lstStyle/>
+              <a:rPr sz="2300" b="0" i="0">
+                <a:solidFill>
+                  <a:srgbClr val="2B2B2B"/>
+                </a:solidFill>
+                <a:latin typeface="Arial"/>
+              </a:rPr>
+              <a:t>One clean failure: </a:t>
+            </a:r>
+            <a:r>
+              <a:rPr sz="2300" b="1" i="0">
+                <a:solidFill>
+                  <a:srgbClr val="2B2B2B"/>
+                </a:solidFill>
+                <a:latin typeface="Arial"/>
+              </a:rPr>
+              <a:t>pixelation</a:t>
+            </a:r>
+            <a:r>
+              <a:rPr sz="2300" b="0" i="0">
+                <a:solidFill>
+                  <a:srgbClr val="2B2B2B"/>
+                </a:solidFill>
+                <a:latin typeface="Arial"/>
+              </a:rPr>
+              <a:t> destroys the detail corners are made of.</a:t>
+            </a:r>
+          </a:p>
           <a:p>
             <a:pPr algn="l">
               <a:lnSpc>
@@ -6305,15 +6287,159 @@
               </a:spcAft>
             </a:pPr>
             <a:r>
-              <a:rPr sz="2400" b="0" i="0">
-                <a:solidFill>
-                  <a:srgbClr val="2B2B2B"/>
-                </a:solidFill>
-                <a:latin typeface="Arial"/>
-              </a:rPr>
-              <a:t>Change only sHash; keep the paper's own thresholds.</a:t>
-            </a:r>
-          </a:p>
+              <a:rPr sz="2000" b="0" i="0">
+                <a:solidFill>
+                  <a:srgbClr val="5F6368"/>
+                </a:solidFill>
+                <a:latin typeface="Arial"/>
+              </a:rPr>
+              <a:t>*Always includes rotation; pure mirrors: 100%.</a:t>
+            </a:r>
+          </a:p>
+        </p:txBody>
+      </p:sp>
+      <p:sp>
+        <p:nvSpPr>
+          <p:cNvPr id="66" name="Rectangle 65"/>
+          <p:cNvSpPr/>
+          <p:nvPr/>
+        </p:nvSpPr>
+        <p:spPr>
+          <a:xfrm>
+            <a:off x="12888000" y="22342583"/>
+            <a:ext cx="11592000" cy="827999"/>
+          </a:xfrm>
+          <a:prstGeom prst="rect">
+            <a:avLst/>
+          </a:prstGeom>
+          <a:solidFill>
+            <a:srgbClr val="E3EAF5"/>
+          </a:solidFill>
+          <a:ln>
+            <a:noFill/>
+          </a:ln>
+          <a:effectLst/>
+        </p:spPr>
+        <p:style>
+          <a:lnRef idx="1">
+            <a:schemeClr val="accent1"/>
+          </a:lnRef>
+          <a:fillRef idx="3">
+            <a:schemeClr val="accent1"/>
+          </a:fillRef>
+          <a:effectRef idx="2">
+            <a:schemeClr val="accent1"/>
+          </a:effectRef>
+          <a:fontRef idx="minor">
+            <a:schemeClr val="lt1"/>
+          </a:fontRef>
+        </p:style>
+        <p:txBody>
+          <a:bodyPr rtlCol="0" anchor="ctr" lIns="432000"/>
+          <a:lstStyle/>
+          <a:p>
+            <a:pPr algn="l"/>
+            <a:r>
+              <a:rPr sz="3800" b="1">
+                <a:solidFill>
+                  <a:srgbClr val="1B3A6B"/>
+                </a:solidFill>
+                <a:latin typeface="Arial"/>
+              </a:rPr>
+              <a:t>Result 3: +8.9 F1 in the whole detector</a:t>
+            </a:r>
+          </a:p>
+        </p:txBody>
+      </p:sp>
+      <p:sp>
+        <p:nvSpPr>
+          <p:cNvPr id="67" name="Rectangle 66"/>
+          <p:cNvSpPr/>
+          <p:nvPr/>
+        </p:nvSpPr>
+        <p:spPr>
+          <a:xfrm>
+            <a:off x="12888000" y="22342583"/>
+            <a:ext cx="162000" cy="827999"/>
+          </a:xfrm>
+          <a:prstGeom prst="rect">
+            <a:avLst/>
+          </a:prstGeom>
+          <a:solidFill>
+            <a:srgbClr val="1B3A6B"/>
+          </a:solidFill>
+          <a:ln>
+            <a:noFill/>
+          </a:ln>
+          <a:effectLst/>
+        </p:spPr>
+        <p:style>
+          <a:lnRef idx="1">
+            <a:schemeClr val="accent1"/>
+          </a:lnRef>
+          <a:fillRef idx="3">
+            <a:schemeClr val="accent1"/>
+          </a:fillRef>
+          <a:effectRef idx="2">
+            <a:schemeClr val="accent1"/>
+          </a:effectRef>
+          <a:fontRef idx="minor">
+            <a:schemeClr val="lt1"/>
+          </a:fontRef>
+        </p:style>
+        <p:txBody>
+          <a:bodyPr rtlCol="0" anchor="ctr"/>
+          <a:lstStyle/>
+          <a:p>
+            <a:pPr algn="ctr"/>
+          </a:p>
+        </p:txBody>
+      </p:sp>
+      <p:pic>
+        <p:nvPicPr>
+          <p:cNvPr id="68" name="Picture 67" descr="fig_whole_detector.png"/>
+          <p:cNvPicPr>
+            <a:picLocks noChangeAspect="1"/>
+          </p:cNvPicPr>
+          <p:nvPr/>
+        </p:nvPicPr>
+        <p:blipFill>
+          <a:blip r:embed="rId10"/>
+          <a:stretch>
+            <a:fillRect/>
+          </a:stretch>
+        </p:blipFill>
+        <p:spPr>
+          <a:xfrm>
+            <a:off x="12888000" y="23458583"/>
+            <a:ext cx="7020000" cy="4295064"/>
+          </a:xfrm>
+          <a:prstGeom prst="rect">
+            <a:avLst/>
+          </a:prstGeom>
+        </p:spPr>
+      </p:pic>
+      <p:sp>
+        <p:nvSpPr>
+          <p:cNvPr id="69" name="TextBox 68"/>
+          <p:cNvSpPr txBox="1"/>
+          <p:nvPr/>
+        </p:nvSpPr>
+        <p:spPr>
+          <a:xfrm>
+            <a:off x="20196000" y="23458583"/>
+            <a:ext cx="4284000" cy="4295064"/>
+          </a:xfrm>
+          <a:prstGeom prst="rect">
+            <a:avLst/>
+          </a:prstGeom>
+          <a:noFill/>
+        </p:spPr>
+        <p:txBody>
+          <a:bodyPr wrap="square" anchor="ctr" lIns="0" rIns="0" tIns="0" bIns="0">
+            <a:spAutoFit/>
+          </a:bodyPr>
+          <a:lstStyle/>
           <a:p>
             <a:pPr algn="l">
               <a:lnSpc>
@@ -6330,43 +6456,7 @@
                 </a:solidFill>
                 <a:latin typeface="Arial"/>
               </a:rPr>
-              <a:t>At the same </a:t>
-            </a:r>
-            <a:r>
-              <a:rPr sz="2400" b="1" i="0">
-                <a:solidFill>
-                  <a:srgbClr val="2B2B2B"/>
-                </a:solidFill>
-                <a:latin typeface="Arial"/>
-              </a:rPr>
-              <a:t>98.1% precision</a:t>
-            </a:r>
-            <a:r>
-              <a:rPr sz="2400" b="0" i="0">
-                <a:solidFill>
-                  <a:srgbClr val="2B2B2B"/>
-                </a:solidFill>
-                <a:latin typeface="Arial"/>
-              </a:rPr>
-              <a:t>, recall rises from </a:t>
-            </a:r>
-            <a:r>
-              <a:rPr sz="2400" b="1" i="0">
-                <a:solidFill>
-                  <a:srgbClr val="2B2B2B"/>
-                </a:solidFill>
-                <a:latin typeface="Arial"/>
-              </a:rPr>
-              <a:t>64.1% to 77.2%</a:t>
-            </a:r>
-            <a:r>
-              <a:rPr sz="2400" b="0" i="0">
-                <a:solidFill>
-                  <a:srgbClr val="2B2B2B"/>
-                </a:solidFill>
-                <a:latin typeface="Arial"/>
-              </a:rPr>
-              <a:t>: ~1,500 more copies caught.</a:t>
+              <a:t>Change only sHash; keep the paper's own thresholds.</a:t>
             </a:r>
           </a:p>
           <a:p>
@@ -6379,6 +6469,61 @@
               </a:spcAft>
             </a:pPr>
             <a:r>
+              <a:rPr sz="2400" b="0" i="0">
+                <a:solidFill>
+                  <a:srgbClr val="2B2B2B"/>
+                </a:solidFill>
+                <a:latin typeface="Arial"/>
+              </a:rPr>
+              <a:t>At the same </a:t>
+            </a:r>
+            <a:r>
+              <a:rPr sz="2400" b="1" i="0">
+                <a:solidFill>
+                  <a:srgbClr val="2B2B2B"/>
+                </a:solidFill>
+                <a:latin typeface="Arial"/>
+              </a:rPr>
+              <a:t>98.1% precision</a:t>
+            </a:r>
+            <a:r>
+              <a:rPr sz="2400" b="0" i="0">
+                <a:solidFill>
+                  <a:srgbClr val="2B2B2B"/>
+                </a:solidFill>
+                <a:latin typeface="Arial"/>
+              </a:rPr>
+              <a:t>, recall rises from </a:t>
+            </a:r>
+            <a:r>
+              <a:rPr sz="2400" b="1" i="0">
+                <a:solidFill>
+                  <a:srgbClr val="2B2B2B"/>
+                </a:solidFill>
+                <a:latin typeface="Arial"/>
+              </a:rPr>
+              <a:t>64.1% to 77.2%</a:t>
+            </a:r>
+            <a:r>
+              <a:rPr sz="2400" b="0" i="0">
+                <a:solidFill>
+                  <a:srgbClr val="2B2B2B"/>
+                </a:solidFill>
+                <a:latin typeface="Arial"/>
+              </a:rPr>
+              <a:t>: ~1,500 more copies caught.</a:t>
+            </a:r>
+          </a:p>
+          <a:p>
+            <a:pPr algn="l">
+              <a:lnSpc>
+                <a:spcPct val="112000"/>
+              </a:lnSpc>
+              <a:spcAft>
+                <a:spcPts val="600"/>
+              </a:spcAft>
+            </a:pPr>
+            <a:r>
               <a:rPr sz="2000" b="0" i="0">
                 <a:solidFill>
                   <a:srgbClr val="5F6368"/>
@@ -6392,13 +6537,13 @@
       </p:sp>
       <p:sp>
         <p:nvSpPr>
-          <p:cNvPr id="67" name="Rectangle 66"/>
+          <p:cNvPr id="70" name="Rectangle 69"/>
           <p:cNvSpPr/>
           <p:nvPr/>
         </p:nvSpPr>
         <p:spPr>
           <a:xfrm>
-            <a:off x="12888000" y="27679414"/>
+            <a:off x="12888000" y="28221648"/>
             <a:ext cx="11592000" cy="827999"/>
           </a:xfrm>
           <a:prstGeom prst="rect">
@@ -6445,13 +6590,13 @@
       </p:sp>
       <p:sp>
         <p:nvSpPr>
-          <p:cNvPr id="68" name="Rectangle 67"/>
+          <p:cNvPr id="71" name="Rectangle 70"/>
           <p:cNvSpPr/>
           <p:nvPr/>
         </p:nvSpPr>
         <p:spPr>
           <a:xfrm>
-            <a:off x="12888000" y="27679414"/>
+            <a:off x="12888000" y="28221648"/>
             <a:ext cx="162000" cy="827999"/>
           </a:xfrm>
           <a:prstGeom prst="rect">
@@ -6489,13 +6634,13 @@
       </p:sp>
       <p:sp>
         <p:nvSpPr>
-          <p:cNvPr id="69" name="TextBox 68"/>
+          <p:cNvPr id="72" name="TextBox 71"/>
           <p:cNvSpPr txBox="1"/>
           <p:nvPr/>
         </p:nvSpPr>
         <p:spPr>
           <a:xfrm>
-            <a:off x="12888000" y="28795414"/>
+            <a:off x="12888000" y="29337648"/>
             <a:ext cx="11592000" cy="3960000"/>
           </a:xfrm>
           <a:prstGeom prst="rect">
@@ -6561,7 +6706,7 @@
                 </a:solidFill>
                 <a:latin typeface="Arial"/>
               </a:rPr>
-              <a:t>A fingerprint fits a tree; a set of landmarks needs LSH, and far more space.</a:t>
+              <a:t>A fingerprint fits a tree; a set of landmarks needs LSH, far more space, and ≈34 ms per pair instead of ≈0.1 µs.</a:t>
             </a:r>
           </a:p>
           <a:p>
@@ -6624,7 +6769,7 @@
       </p:sp>
       <p:sp>
         <p:nvSpPr>
-          <p:cNvPr id="70" name="Rectangle 69"/>
+          <p:cNvPr id="73" name="Rectangle 72"/>
           <p:cNvSpPr/>
           <p:nvPr/>
         </p:nvSpPr>
@@ -6668,7 +6813,7 @@
       </p:sp>
       <p:sp>
         <p:nvSpPr>
-          <p:cNvPr id="71" name="TextBox 70"/>
+          <p:cNvPr id="74" name="TextBox 73"/>
           <p:cNvSpPr txBox="1"/>
           <p:nvPr/>
         </p:nvSpPr>
